--- a/AKFA_Dilerlik_Investor_Prezentatsiyasi.pptx
+++ b/AKFA_Dilerlik_Investor_Prezentatsiyasi.pptx
@@ -2123,7 +2123,7 @@
                   <c:v>2.59</c:v>
                 </c:pt>
                 <c:pt idx="3">
-                  <c:v>8.94</c:v>
+                  <c:v>9.04</c:v>
                 </c:pt>
               </c:numCache>
             </c:numRef>
@@ -20573,7 +20573,7 @@
                   <a:srgbClr val="10B981"/>
                 </a:solidFill>
               </a:rPr>
-              <a:t>8.94 mlrd UZS</a:t>
+              <a:t>9.04 mlrd UZS</a:t>
             </a:r>
             <a:endParaRPr lang="en-US" sz="2000" dirty="0"/>
           </a:p>
@@ -20609,7 +20609,7 @@
                   <a:srgbClr val="B9BEC2"/>
                 </a:solidFill>
               </a:rPr>
-              <a:t>2025 ga nisbatan: +245% o‘sish</a:t>
+              <a:t>2025 ga nisbatan: +249% o‘sish</a:t>
             </a:r>
             <a:endParaRPr lang="en-US" sz="1000" dirty="0"/>
           </a:p>
@@ -20708,7 +20708,7 @@
                   <a:srgbClr val="EE3526"/>
                 </a:solidFill>
               </a:rPr>
-              <a:t>3.24%</a:t>
+              <a:t>3.28%</a:t>
             </a:r>
             <a:endParaRPr lang="en-US" sz="2000" dirty="0"/>
           </a:p>
@@ -21697,7 +21697,7 @@
                           <a:ea typeface="Calibri" pitchFamily="34" charset="-122"/>
                           <a:cs typeface="Calibri" pitchFamily="34" charset="-120"/>
                         </a:rPr>
-                        <a:t>745 mln o‘rtacha daromad</a:t>
+                        <a:t>753.3 mln o‘rtacha daromad</a:t>
                       </a:r>
                       <a:endParaRPr lang="en-US" sz="950" dirty="0">
                         <a:latin typeface="Calibri" charset="0"/>
@@ -23613,7 +23613,7 @@
                           <a:ea typeface="Calibri" pitchFamily="34" charset="-122"/>
                           <a:cs typeface="Calibri" pitchFamily="34" charset="-120"/>
                         </a:rPr>
-                        <a:t>940 000 000</a:t>
+                        <a:t>1 040 000 000</a:t>
                       </a:r>
                       <a:endParaRPr lang="en-US" sz="950" dirty="0">
                         <a:latin typeface="Calibri" charset="0"/>
@@ -23681,7 +23681,7 @@
                           <a:ea typeface="Calibri" pitchFamily="34" charset="-122"/>
                           <a:cs typeface="Calibri" pitchFamily="34" charset="-120"/>
                         </a:rPr>
-                        <a:t>3.48%</a:t>
+                        <a:t>3.85%</a:t>
                       </a:r>
                       <a:endParaRPr lang="en-US" sz="950" dirty="0">
                         <a:latin typeface="Calibri" charset="0"/>
@@ -25665,7 +25665,7 @@
                           <a:ea typeface="Calibri" pitchFamily="34" charset="-122"/>
                           <a:cs typeface="Calibri" pitchFamily="34" charset="-120"/>
                         </a:rPr>
-                        <a:t>8 940 000 000</a:t>
+                        <a:t>9 040 000 000</a:t>
                       </a:r>
                       <a:endParaRPr lang="en-US" sz="950" dirty="0">
                         <a:latin typeface="Calibri" charset="0"/>
@@ -25733,7 +25733,7 @@
                           <a:ea typeface="Calibri" pitchFamily="34" charset="-122"/>
                           <a:cs typeface="Calibri" pitchFamily="34" charset="-120"/>
                         </a:rPr>
-                        <a:t>3.24%</a:t>
+                        <a:t>3.28%</a:t>
                       </a:r>
                       <a:endParaRPr lang="en-US" sz="950" dirty="0">
                         <a:latin typeface="Calibri" charset="0"/>
@@ -25801,7 +25801,7 @@
                           <a:ea typeface="Calibri" pitchFamily="34" charset="-122"/>
                           <a:cs typeface="Calibri" pitchFamily="34" charset="-120"/>
                         </a:rPr>
-                        <a:t>8.94 mlrd sof foyda</a:t>
+                        <a:t>9.04 mlrd sof foyda</a:t>
                       </a:r>
                       <a:endParaRPr lang="en-US" sz="950" dirty="0">
                         <a:latin typeface="Calibri" charset="0"/>

--- a/AKFA_Dilerlik_Investor_Prezentatsiyasi.pptx
+++ b/AKFA_Dilerlik_Investor_Prezentatsiyasi.pptx
@@ -5415,7 +5415,7 @@
       </p:grpSpPr>
       <p:pic>
         <p:nvPicPr>
-          <p:cNvPr id="2" name="Image 0" descr="C:\Users\WECAN\Downloads\akfa invest\assets\hero-bg.jpg">    </p:cNvPr>
+          <p:cNvPr id="2" name="Image 0" descr="C:\Users\WECAN\Downloads\akfa invest — копия\assets\hero-bg.jpg">    </p:cNvPr>
           <p:cNvPicPr>
             <a:picLocks noChangeAspect="1"/>
           </p:cNvPicPr>
@@ -35502,7 +35502,7 @@
       </p:grpSpPr>
       <p:pic>
         <p:nvPicPr>
-          <p:cNvPr id="2" name="Image 0" descr="C:\Users\WECAN\Downloads\akfa invest\assets\construction.jpg">    </p:cNvPr>
+          <p:cNvPr id="2" name="Image 0" descr="C:\Users\WECAN\Downloads\akfa invest — копия\assets\construction.jpg">    </p:cNvPr>
           <p:cNvPicPr>
             <a:picLocks noChangeAspect="1"/>
           </p:cNvPicPr>
@@ -39701,7 +39701,7 @@
       </p:sp>
       <p:pic>
         <p:nvPicPr>
-          <p:cNvPr id="5" name="Image 0" descr="C:\Users\WECAN\Downloads\akfa invest\assets\warehouse.jpg">    </p:cNvPr>
+          <p:cNvPr id="5" name="Image 0" descr="C:\Users\WECAN\Downloads\akfa invest — копия\assets\warehouse.jpg">    </p:cNvPr>
           <p:cNvPicPr>
             <a:picLocks noChangeAspect="1"/>
           </p:cNvPicPr>

--- a/AKFA_Dilerlik_Investor_Prezentatsiyasi.pptx
+++ b/AKFA_Dilerlik_Investor_Prezentatsiyasi.pptx
@@ -29,9 +29,10 @@
     <p:sldId id="277" r:id="rId23"/>
     <p:sldId id="278" r:id="rId24"/>
     <p:sldId id="279" r:id="rId25"/>
+    <p:sldId id="280" r:id="rId26"/>
   </p:sldIdLst>
   <p:notesMasterIdLst>
-    <p:notesMasterId r:id="rId26"/>
+    <p:notesMasterId r:id="rId27"/>
   </p:notesMasterIdLst>
   <p:sldSz cx="9144000" cy="5143500"/>
   <p:notesSz cx="5143500" cy="9144000"/>
@@ -2123,7 +2124,7 @@
                   <c:v>2.59</c:v>
                 </c:pt>
                 <c:pt idx="3">
-                  <c:v>9.04</c:v>
+                  <c:v>4.52</c:v>
                 </c:pt>
               </c:numCache>
             </c:numRef>
@@ -4448,6 +4449,94 @@
             <a:fld id="{F7021451-1387-4CA6-816F-3879F97B5CBC}" type="slidenum">
               <a:rPr lang="en-US"/>
               <a:t>24</a:t>
+            </a:fld>
+            <a:endParaRPr lang="en-US"/>
+          </a:p>
+        </p:txBody>
+      </p:sp>
+    </p:spTree>
+    <p:extLst>
+      <p:ext uri="{BB962C8B-B14F-4D97-AF65-F5344CB8AC3E}">
+        <p14:creationId xmlns:p14="http://schemas.microsoft.com/office/powerpoint/2010/main" val="1024086991"/>
+      </p:ext>
+    </p:extLst>
+  </p:cSld>
+  <p:clrMapOvr>
+    <a:masterClrMapping/>
+  </p:clrMapOvr>
+</p:notes>
+</file>
+
+<file path=ppt/notesSlides/notesSlide25.xml><?xml version="1.0" encoding="utf-8"?>
+<p:notes xmlns:a="http://schemas.openxmlformats.org/drawingml/2006/main" xmlns:r="http://schemas.openxmlformats.org/officeDocument/2006/relationships" xmlns:p="http://schemas.openxmlformats.org/presentationml/2006/main">
+  <p:cSld>
+    <p:spTree>
+      <p:nvGrpSpPr>
+        <p:cNvPr id="1" name=""/>
+        <p:cNvGrpSpPr/>
+        <p:nvPr/>
+      </p:nvGrpSpPr>
+      <p:grpSpPr>
+        <a:xfrm>
+          <a:off x="0" y="0"/>
+          <a:ext cx="0" cy="0"/>
+          <a:chOff x="0" y="0"/>
+          <a:chExt cx="0" cy="0"/>
+        </a:xfrm>
+      </p:grpSpPr>
+      <p:sp>
+        <p:nvSpPr>
+          <p:cNvPr id="2" name="Slide Image Placeholder 1"/>
+          <p:cNvSpPr>
+            <a:spLocks noGrp="1" noRot="1" noChangeAspect="1"/>
+          </p:cNvSpPr>
+          <p:nvPr>
+            <p:ph type="sldImg"/>
+          </p:nvPr>
+        </p:nvSpPr>
+        <p:spPr/>
+      </p:sp>
+      <p:sp>
+        <p:nvSpPr>
+          <p:cNvPr id="3" name="Notes Placeholder 2"/>
+          <p:cNvSpPr>
+            <a:spLocks noGrp="1"/>
+          </p:cNvSpPr>
+          <p:nvPr>
+            <p:ph type="body" idx="1"/>
+          </p:nvPr>
+        </p:nvSpPr>
+        <p:spPr/>
+        <p:txBody>
+          <a:bodyPr/>
+          <a:lstStyle/>
+          <a:p>
+            <a:r>
+              <a:rPr lang="en-US" dirty="0"/>
+              <a:t/>
+            </a:r>
+            <a:endParaRPr lang="en-US" dirty="0"/>
+          </a:p>
+        </p:txBody>
+      </p:sp>
+      <p:sp>
+        <p:nvSpPr>
+          <p:cNvPr id="4" name="Slide Number Placeholder 3"/>
+          <p:cNvSpPr>
+            <a:spLocks noGrp="1"/>
+          </p:cNvSpPr>
+          <p:nvPr>
+            <p:ph type="sldNum" sz="quarter" idx="10"/>
+          </p:nvPr>
+        </p:nvSpPr>
+        <p:spPr/>
+        <p:txBody>
+          <a:bodyPr/>
+          <a:lstStyle/>
+          <a:p>
+            <a:fld id="{F7021451-1387-4CA6-816F-3879F97B5CBC}" type="slidenum">
+              <a:rPr lang="en-US"/>
+              <a:t>25</a:t>
             </a:fld>
             <a:endParaRPr lang="en-US"/>
           </a:p>
@@ -5415,7 +5504,7 @@
       </p:grpSpPr>
       <p:pic>
         <p:nvPicPr>
-          <p:cNvPr id="2" name="Image 0" descr="C:\Users\WECAN\Downloads\akfa invest — копия\assets\hero-bg.jpg">    </p:cNvPr>
+          <p:cNvPr id="2" name="Image 0" descr="C:\Users\WECAN\Downloads\akfa invest 5050\assets\hero-bg.jpg">    </p:cNvPr>
           <p:cNvPicPr>
             <a:picLocks noChangeAspect="1"/>
           </p:cNvPicPr>
@@ -20573,7 +20662,7 @@
                   <a:srgbClr val="10B981"/>
                 </a:solidFill>
               </a:rPr>
-              <a:t>9.04 mlrd UZS</a:t>
+              <a:t>4.52 mlrd UZS</a:t>
             </a:r>
             <a:endParaRPr lang="en-US" sz="2000" dirty="0"/>
           </a:p>
@@ -20609,7 +20698,7 @@
                   <a:srgbClr val="B9BEC2"/>
                 </a:solidFill>
               </a:rPr>
-              <a:t>2025 ga nisbatan: +249% o‘sish</a:t>
+              <a:t>2025 ga nisbatan: +74% o‘sish</a:t>
             </a:r>
             <a:endParaRPr lang="en-US" sz="1000" dirty="0"/>
           </a:p>
@@ -20708,7 +20797,7 @@
                   <a:srgbClr val="EE3526"/>
                 </a:solidFill>
               </a:rPr>
-              <a:t>3.28%</a:t>
+              <a:t>1.64%</a:t>
             </a:r>
             <a:endParaRPr lang="en-US" sz="2000" dirty="0"/>
           </a:p>
@@ -21561,7 +21650,7 @@
                           <a:ea typeface="Calibri" pitchFamily="34" charset="-122"/>
                           <a:cs typeface="Calibri" pitchFamily="34" charset="-120"/>
                         </a:rPr>
-                        <a:t>420 000 000</a:t>
+                        <a:t>210 000 000</a:t>
                       </a:r>
                       <a:endParaRPr lang="en-US" sz="950" dirty="0">
                         <a:latin typeface="Calibri" charset="0"/>
@@ -21629,7 +21718,7 @@
                           <a:ea typeface="Calibri" pitchFamily="34" charset="-122"/>
                           <a:cs typeface="Calibri" pitchFamily="34" charset="-120"/>
                         </a:rPr>
-                        <a:t>2.63%</a:t>
+                        <a:t>1.31%</a:t>
                       </a:r>
                       <a:endParaRPr lang="en-US" sz="950" dirty="0">
                         <a:latin typeface="Calibri" charset="0"/>
@@ -21697,7 +21786,7 @@
                           <a:ea typeface="Calibri" pitchFamily="34" charset="-122"/>
                           <a:cs typeface="Calibri" pitchFamily="34" charset="-120"/>
                         </a:rPr>
-                        <a:t>753.3 mln o‘rtacha daromad</a:t>
+                        <a:t>376.7 mln o‘rtacha daromad</a:t>
                       </a:r>
                       <a:endParaRPr lang="en-US" sz="950" dirty="0">
                         <a:latin typeface="Calibri" charset="0"/>
@@ -21903,7 +21992,7 @@
                           <a:ea typeface="Calibri" pitchFamily="34" charset="-122"/>
                           <a:cs typeface="Calibri" pitchFamily="34" charset="-120"/>
                         </a:rPr>
-                        <a:t>460 000 000</a:t>
+                        <a:t>230 000 000</a:t>
                       </a:r>
                       <a:endParaRPr lang="en-US" sz="950" dirty="0">
                         <a:latin typeface="Calibri" charset="0"/>
@@ -21971,7 +22060,7 @@
                           <a:ea typeface="Calibri" pitchFamily="34" charset="-122"/>
                           <a:cs typeface="Calibri" pitchFamily="34" charset="-120"/>
                         </a:rPr>
-                        <a:t>2.71%</a:t>
+                        <a:t>1.35%</a:t>
                       </a:r>
                       <a:endParaRPr lang="en-US" sz="950" dirty="0">
                         <a:latin typeface="Calibri" charset="0"/>
@@ -22245,7 +22334,7 @@
                           <a:ea typeface="Calibri" pitchFamily="34" charset="-122"/>
                           <a:cs typeface="Calibri" pitchFamily="34" charset="-120"/>
                         </a:rPr>
-                        <a:t>500 000 000</a:t>
+                        <a:t>250 000 000</a:t>
                       </a:r>
                       <a:endParaRPr lang="en-US" sz="950" dirty="0">
                         <a:latin typeface="Calibri" charset="0"/>
@@ -22313,7 +22402,7 @@
                           <a:ea typeface="Calibri" pitchFamily="34" charset="-122"/>
                           <a:cs typeface="Calibri" pitchFamily="34" charset="-120"/>
                         </a:rPr>
-                        <a:t>2.78%</a:t>
+                        <a:t>1.39%</a:t>
                       </a:r>
                       <a:endParaRPr lang="en-US" sz="950" dirty="0">
                         <a:latin typeface="Calibri" charset="0"/>
@@ -22587,7 +22676,7 @@
                           <a:ea typeface="Calibri" pitchFamily="34" charset="-122"/>
                           <a:cs typeface="Calibri" pitchFamily="34" charset="-120"/>
                         </a:rPr>
-                        <a:t>620 000 000</a:t>
+                        <a:t>310 000 000</a:t>
                       </a:r>
                       <a:endParaRPr lang="en-US" sz="950" dirty="0">
                         <a:latin typeface="Calibri" charset="0"/>
@@ -22655,7 +22744,7 @@
                           <a:ea typeface="Calibri" pitchFamily="34" charset="-122"/>
                           <a:cs typeface="Calibri" pitchFamily="34" charset="-120"/>
                         </a:rPr>
-                        <a:t>2.95%</a:t>
+                        <a:t>1.48%</a:t>
                       </a:r>
                       <a:endParaRPr lang="en-US" sz="950" dirty="0">
                         <a:latin typeface="Calibri" charset="0"/>
@@ -22929,7 +23018,7 @@
                           <a:ea typeface="Calibri" pitchFamily="34" charset="-122"/>
                           <a:cs typeface="Calibri" pitchFamily="34" charset="-120"/>
                         </a:rPr>
-                        <a:t>820 000 000</a:t>
+                        <a:t>410 000 000</a:t>
                       </a:r>
                       <a:endParaRPr lang="en-US" sz="950" dirty="0">
                         <a:latin typeface="Calibri" charset="0"/>
@@ -22997,7 +23086,7 @@
                           <a:ea typeface="Calibri" pitchFamily="34" charset="-122"/>
                           <a:cs typeface="Calibri" pitchFamily="34" charset="-120"/>
                         </a:rPr>
-                        <a:t>3.42%</a:t>
+                        <a:t>1.71%</a:t>
                       </a:r>
                       <a:endParaRPr lang="en-US" sz="950" dirty="0">
                         <a:latin typeface="Calibri" charset="0"/>
@@ -23271,7 +23360,7 @@
                           <a:ea typeface="Calibri" pitchFamily="34" charset="-122"/>
                           <a:cs typeface="Calibri" pitchFamily="34" charset="-120"/>
                         </a:rPr>
-                        <a:t>900 000 000</a:t>
+                        <a:t>450 000 000</a:t>
                       </a:r>
                       <a:endParaRPr lang="en-US" sz="950" dirty="0">
                         <a:latin typeface="Calibri" charset="0"/>
@@ -23339,7 +23428,7 @@
                           <a:ea typeface="Calibri" pitchFamily="34" charset="-122"/>
                           <a:cs typeface="Calibri" pitchFamily="34" charset="-120"/>
                         </a:rPr>
-                        <a:t>3.46%</a:t>
+                        <a:t>1.73%</a:t>
                       </a:r>
                       <a:endParaRPr lang="en-US" sz="950" dirty="0">
                         <a:latin typeface="Calibri" charset="0"/>
@@ -23613,7 +23702,7 @@
                           <a:ea typeface="Calibri" pitchFamily="34" charset="-122"/>
                           <a:cs typeface="Calibri" pitchFamily="34" charset="-120"/>
                         </a:rPr>
-                        <a:t>1 040 000 000</a:t>
+                        <a:t>520 000 000</a:t>
                       </a:r>
                       <a:endParaRPr lang="en-US" sz="950" dirty="0">
                         <a:latin typeface="Calibri" charset="0"/>
@@ -23681,7 +23770,7 @@
                           <a:ea typeface="Calibri" pitchFamily="34" charset="-122"/>
                           <a:cs typeface="Calibri" pitchFamily="34" charset="-120"/>
                         </a:rPr>
-                        <a:t>3.85%</a:t>
+                        <a:t>1.93%</a:t>
                       </a:r>
                       <a:endParaRPr lang="en-US" sz="950" dirty="0">
                         <a:latin typeface="Calibri" charset="0"/>
@@ -23955,7 +24044,7 @@
                           <a:ea typeface="Calibri" pitchFamily="34" charset="-122"/>
                           <a:cs typeface="Calibri" pitchFamily="34" charset="-120"/>
                         </a:rPr>
-                        <a:t>1 060 000 000</a:t>
+                        <a:t>530 000 000</a:t>
                       </a:r>
                       <a:endParaRPr lang="en-US" sz="950" dirty="0">
                         <a:latin typeface="Calibri" charset="0"/>
@@ -24023,7 +24112,7 @@
                           <a:ea typeface="Calibri" pitchFamily="34" charset="-122"/>
                           <a:cs typeface="Calibri" pitchFamily="34" charset="-120"/>
                         </a:rPr>
-                        <a:t>3.53%</a:t>
+                        <a:t>1.77%</a:t>
                       </a:r>
                       <a:endParaRPr lang="en-US" sz="950" dirty="0">
                         <a:latin typeface="Calibri" charset="0"/>
@@ -24297,7 +24386,7 @@
                           <a:ea typeface="Calibri" pitchFamily="34" charset="-122"/>
                           <a:cs typeface="Calibri" pitchFamily="34" charset="-120"/>
                         </a:rPr>
-                        <a:t>1 060 000 000</a:t>
+                        <a:t>530 000 000</a:t>
                       </a:r>
                       <a:endParaRPr lang="en-US" sz="950" dirty="0">
                         <a:latin typeface="Calibri" charset="0"/>
@@ -24365,7 +24454,7 @@
                           <a:ea typeface="Calibri" pitchFamily="34" charset="-122"/>
                           <a:cs typeface="Calibri" pitchFamily="34" charset="-120"/>
                         </a:rPr>
-                        <a:t>3.53%</a:t>
+                        <a:t>1.77%</a:t>
                       </a:r>
                       <a:endParaRPr lang="en-US" sz="950" dirty="0">
                         <a:latin typeface="Calibri" charset="0"/>
@@ -24639,7 +24728,7 @@
                           <a:ea typeface="Calibri" pitchFamily="34" charset="-122"/>
                           <a:cs typeface="Calibri" pitchFamily="34" charset="-120"/>
                         </a:rPr>
-                        <a:t>900 000 000</a:t>
+                        <a:t>450 000 000</a:t>
                       </a:r>
                       <a:endParaRPr lang="en-US" sz="950" dirty="0">
                         <a:latin typeface="Calibri" charset="0"/>
@@ -24707,7 +24796,7 @@
                           <a:ea typeface="Calibri" pitchFamily="34" charset="-122"/>
                           <a:cs typeface="Calibri" pitchFamily="34" charset="-120"/>
                         </a:rPr>
-                        <a:t>3.46%</a:t>
+                        <a:t>1.73%</a:t>
                       </a:r>
                       <a:endParaRPr lang="en-US" sz="950" dirty="0">
                         <a:latin typeface="Calibri" charset="0"/>
@@ -24981,7 +25070,7 @@
                           <a:ea typeface="Calibri" pitchFamily="34" charset="-122"/>
                           <a:cs typeface="Calibri" pitchFamily="34" charset="-120"/>
                         </a:rPr>
-                        <a:t>780 000 000</a:t>
+                        <a:t>390 000 000</a:t>
                       </a:r>
                       <a:endParaRPr lang="en-US" sz="950" dirty="0">
                         <a:latin typeface="Calibri" charset="0"/>
@@ -25049,7 +25138,7 @@
                           <a:ea typeface="Calibri" pitchFamily="34" charset="-122"/>
                           <a:cs typeface="Calibri" pitchFamily="34" charset="-120"/>
                         </a:rPr>
-                        <a:t>3.39%</a:t>
+                        <a:t>1.70%</a:t>
                       </a:r>
                       <a:endParaRPr lang="en-US" sz="950" dirty="0">
                         <a:latin typeface="Calibri" charset="0"/>
@@ -25323,7 +25412,7 @@
                           <a:ea typeface="Calibri" pitchFamily="34" charset="-122"/>
                           <a:cs typeface="Calibri" pitchFamily="34" charset="-120"/>
                         </a:rPr>
-                        <a:t>480 000 000</a:t>
+                        <a:t>240 000 000</a:t>
                       </a:r>
                       <a:endParaRPr lang="en-US" sz="950" dirty="0">
                         <a:latin typeface="Calibri" charset="0"/>
@@ -25391,7 +25480,7 @@
                           <a:ea typeface="Calibri" pitchFamily="34" charset="-122"/>
                           <a:cs typeface="Calibri" pitchFamily="34" charset="-120"/>
                         </a:rPr>
-                        <a:t>2.67%</a:t>
+                        <a:t>1.33%</a:t>
                       </a:r>
                       <a:endParaRPr lang="en-US" sz="950" dirty="0">
                         <a:latin typeface="Calibri" charset="0"/>
@@ -25665,7 +25754,7 @@
                           <a:ea typeface="Calibri" pitchFamily="34" charset="-122"/>
                           <a:cs typeface="Calibri" pitchFamily="34" charset="-120"/>
                         </a:rPr>
-                        <a:t>9 040 000 000</a:t>
+                        <a:t>4 520 000 000</a:t>
                       </a:r>
                       <a:endParaRPr lang="en-US" sz="950" dirty="0">
                         <a:latin typeface="Calibri" charset="0"/>
@@ -25733,7 +25822,7 @@
                           <a:ea typeface="Calibri" pitchFamily="34" charset="-122"/>
                           <a:cs typeface="Calibri" pitchFamily="34" charset="-120"/>
                         </a:rPr>
-                        <a:t>3.28%</a:t>
+                        <a:t>1.64%</a:t>
                       </a:r>
                       <a:endParaRPr lang="en-US" sz="950" dirty="0">
                         <a:latin typeface="Calibri" charset="0"/>
@@ -25801,7 +25890,7 @@
                           <a:ea typeface="Calibri" pitchFamily="34" charset="-122"/>
                           <a:cs typeface="Calibri" pitchFamily="34" charset="-120"/>
                         </a:rPr>
-                        <a:t>9.04 mlrd sof foyda</a:t>
+                        <a:t>4.52 mlrd sof foyda</a:t>
                       </a:r>
                       <a:endParaRPr lang="en-US" sz="950" dirty="0">
                         <a:latin typeface="Calibri" charset="0"/>
@@ -35500,9 +35589,416 @@
           <a:chExt cx="0" cy="0"/>
         </a:xfrm>
       </p:grpSpPr>
+      <p:sp>
+        <p:nvSpPr>
+          <p:cNvPr id="2" name="Text 0"/>
+          <p:cNvSpPr/>
+          <p:nvPr/>
+        </p:nvSpPr>
+        <p:spPr>
+          <a:xfrm>
+            <a:off x="731520" y="365760"/>
+            <a:ext cx="10515600" cy="274320"/>
+          </a:xfrm>
+          <a:prstGeom prst="rect">
+            <a:avLst/>
+          </a:prstGeom>
+          <a:noFill/>
+          <a:ln/>
+        </p:spPr>
+        <p:txBody>
+          <a:bodyPr wrap="square" rtlCol="0" anchor="ctr"/>
+          <a:lstStyle/>
+          <a:p>
+            <a:pPr indent="0" marL="0">
+              <a:buNone/>
+            </a:pPr>
+            <a:r>
+              <a:rPr lang="en-US" sz="1000" b="1" spc="200" kern="0" dirty="0">
+                <a:solidFill>
+                  <a:srgbClr val="EE3526"/>
+                </a:solidFill>
+                <a:latin typeface="Calibri" pitchFamily="34" charset="0"/>
+                <a:ea typeface="Calibri" pitchFamily="34" charset="-122"/>
+                <a:cs typeface="Calibri" pitchFamily="34" charset="-120"/>
+              </a:rPr>
+              <a:t>23. STRATEGIK HAMKORLIK</a:t>
+            </a:r>
+            <a:endParaRPr lang="en-US" sz="1000" dirty="0"/>
+          </a:p>
+        </p:txBody>
+      </p:sp>
+      <p:sp>
+        <p:nvSpPr>
+          <p:cNvPr id="3" name="Text 1"/>
+          <p:cNvSpPr/>
+          <p:nvPr/>
+        </p:nvSpPr>
+        <p:spPr>
+          <a:xfrm>
+            <a:off x="731520" y="640080"/>
+            <a:ext cx="10515600" cy="548640"/>
+          </a:xfrm>
+          <a:prstGeom prst="rect">
+            <a:avLst/>
+          </a:prstGeom>
+          <a:noFill/>
+          <a:ln/>
+        </p:spPr>
+        <p:txBody>
+          <a:bodyPr wrap="square" rtlCol="0" anchor="ctr"/>
+          <a:lstStyle/>
+          <a:p>
+            <a:pPr indent="0" marL="0">
+              <a:buNone/>
+            </a:pPr>
+            <a:r>
+              <a:rPr lang="en-US" sz="2200" b="1" dirty="0">
+                <a:solidFill>
+                  <a:srgbClr val="FFFFFF"/>
+                </a:solidFill>
+                <a:latin typeface="Calibri" pitchFamily="34" charset="0"/>
+                <a:ea typeface="Calibri" pitchFamily="34" charset="-122"/>
+                <a:cs typeface="Calibri" pitchFamily="34" charset="-120"/>
+              </a:rPr>
+              <a:t>Yangi Hamkorligimiz Barakali Bo'lsin!</a:t>
+            </a:r>
+            <a:endParaRPr lang="en-US" sz="2200" dirty="0"/>
+          </a:p>
+        </p:txBody>
+      </p:sp>
+      <p:sp>
+        <p:nvSpPr>
+          <p:cNvPr id="4" name="Shape 2"/>
+          <p:cNvSpPr/>
+          <p:nvPr/>
+        </p:nvSpPr>
+        <p:spPr>
+          <a:xfrm>
+            <a:off x="731520" y="1234440"/>
+            <a:ext cx="1371600" cy="36576"/>
+          </a:xfrm>
+          <a:prstGeom prst="rect">
+            <a:avLst/>
+          </a:prstGeom>
+          <a:solidFill>
+            <a:srgbClr val="EE3526"/>
+          </a:solidFill>
+          <a:ln w="12700">
+            <a:solidFill>
+              <a:srgbClr val="EE3526"/>
+            </a:solidFill>
+            <a:prstDash val="solid"/>
+          </a:ln>
+        </p:spPr>
+      </p:sp>
+      <p:sp>
+        <p:nvSpPr>
+          <p:cNvPr id="5" name="Text 3"/>
+          <p:cNvSpPr/>
+          <p:nvPr/>
+        </p:nvSpPr>
+        <p:spPr>
+          <a:xfrm>
+            <a:off x="731520" y="1325880"/>
+            <a:ext cx="10698480" cy="365760"/>
+          </a:xfrm>
+          <a:prstGeom prst="rect">
+            <a:avLst/>
+          </a:prstGeom>
+          <a:noFill/>
+          <a:ln/>
+        </p:spPr>
+        <p:txBody>
+          <a:bodyPr wrap="square" rtlCol="0" anchor="ctr"/>
+          <a:lstStyle/>
+          <a:p>
+            <a:pPr algn="ctr" indent="0" marL="0">
+              <a:buNone/>
+            </a:pPr>
+            <a:r>
+              <a:rPr lang="en-US" sz="1300" dirty="0">
+                <a:solidFill>
+                  <a:srgbClr val="B9BEC2"/>
+                </a:solidFill>
+              </a:rPr>
+              <a:t>AKFA Dilerlik Biznesi &amp; Investor — Ishonchli Sheriklik va Muvaffaqiyatli Kelajak Sari</a:t>
+            </a:r>
+            <a:endParaRPr lang="en-US" sz="1300" dirty="0"/>
+          </a:p>
+        </p:txBody>
+      </p:sp>
       <p:pic>
         <p:nvPicPr>
-          <p:cNvPr id="2" name="Image 0" descr="C:\Users\WECAN\Downloads\akfa invest — копия\assets\construction.jpg">    </p:cNvPr>
+          <p:cNvPr id="6" name="Image 0" descr="C:\Users\WECAN\Downloads\akfa invest 5050\assets\handshake.jpg">    </p:cNvPr>
+          <p:cNvPicPr>
+            <a:picLocks noChangeAspect="1"/>
+          </p:cNvPicPr>
+          <p:nvPr/>
+        </p:nvPicPr>
+        <p:blipFill>
+          <a:blip r:embed="rId1"/>
+          <a:srcRect l="0" r="0" t="0" b="0"/>
+          <a:stretch/>
+        </p:blipFill>
+        <p:spPr>
+          <a:xfrm>
+            <a:off x="3346704" y="1828800"/>
+            <a:ext cx="5486400" cy="2468880"/>
+          </a:xfrm>
+          <a:prstGeom prst="rect">
+            <a:avLst/>
+          </a:prstGeom>
+        </p:spPr>
+      </p:pic>
+      <p:sp>
+        <p:nvSpPr>
+          <p:cNvPr id="7" name="Shape 4"/>
+          <p:cNvSpPr/>
+          <p:nvPr/>
+        </p:nvSpPr>
+        <p:spPr>
+          <a:xfrm>
+            <a:off x="3346704" y="1828800"/>
+            <a:ext cx="5486400" cy="2468880"/>
+          </a:xfrm>
+          <a:prstGeom prst="roundRect">
+            <a:avLst>
+              <a:gd name="adj" fmla="val 3704"/>
+            </a:avLst>
+          </a:prstGeom>
+          <a:ln w="19050">
+            <a:solidFill>
+              <a:srgbClr val="EE3526"/>
+            </a:solidFill>
+            <a:prstDash val="solid"/>
+          </a:ln>
+        </p:spPr>
+      </p:sp>
+      <p:sp>
+        <p:nvSpPr>
+          <p:cNvPr id="8" name="Shape 5"/>
+          <p:cNvSpPr/>
+          <p:nvPr/>
+        </p:nvSpPr>
+        <p:spPr>
+          <a:xfrm>
+            <a:off x="1463040" y="4572000"/>
+            <a:ext cx="2926080" cy="594360"/>
+          </a:xfrm>
+          <a:prstGeom prst="roundRect">
+            <a:avLst>
+              <a:gd name="adj" fmla="val 46154"/>
+            </a:avLst>
+          </a:prstGeom>
+          <a:solidFill>
+            <a:srgbClr val="242628"/>
+          </a:solidFill>
+          <a:ln w="15240">
+            <a:solidFill>
+              <a:srgbClr val="EE3526"/>
+            </a:solidFill>
+            <a:prstDash val="solid"/>
+          </a:ln>
+        </p:spPr>
+      </p:sp>
+      <p:sp>
+        <p:nvSpPr>
+          <p:cNvPr id="9" name="Text 6"/>
+          <p:cNvSpPr/>
+          <p:nvPr/>
+        </p:nvSpPr>
+        <p:spPr>
+          <a:xfrm>
+            <a:off x="1463040" y="4572000"/>
+            <a:ext cx="2926080" cy="594360"/>
+          </a:xfrm>
+          <a:prstGeom prst="rect">
+            <a:avLst/>
+          </a:prstGeom>
+          <a:noFill/>
+          <a:ln/>
+        </p:spPr>
+        <p:txBody>
+          <a:bodyPr wrap="square" rtlCol="0" anchor="ctr"/>
+          <a:lstStyle/>
+          <a:p>
+            <a:pPr algn="ctr" indent="0" marL="0">
+              <a:buNone/>
+            </a:pPr>
+            <a:r>
+              <a:rPr lang="en-US" sz="1100" b="1" dirty="0">
+                <a:solidFill>
+                  <a:srgbClr val="EE3526"/>
+                </a:solidFill>
+              </a:rPr>
+              <a:t>🤝 O'zaro Manfaatli Hamkorlik</a:t>
+            </a:r>
+            <a:endParaRPr lang="en-US" sz="1100" dirty="0"/>
+          </a:p>
+        </p:txBody>
+      </p:sp>
+      <p:sp>
+        <p:nvSpPr>
+          <p:cNvPr id="10" name="Shape 7"/>
+          <p:cNvSpPr/>
+          <p:nvPr/>
+        </p:nvSpPr>
+        <p:spPr>
+          <a:xfrm>
+            <a:off x="4663440" y="4572000"/>
+            <a:ext cx="2926080" cy="594360"/>
+          </a:xfrm>
+          <a:prstGeom prst="roundRect">
+            <a:avLst>
+              <a:gd name="adj" fmla="val 46154"/>
+            </a:avLst>
+          </a:prstGeom>
+          <a:solidFill>
+            <a:srgbClr val="242628"/>
+          </a:solidFill>
+          <a:ln w="15240">
+            <a:solidFill>
+              <a:srgbClr val="10B981"/>
+            </a:solidFill>
+            <a:prstDash val="solid"/>
+          </a:ln>
+        </p:spPr>
+      </p:sp>
+      <p:sp>
+        <p:nvSpPr>
+          <p:cNvPr id="11" name="Text 8"/>
+          <p:cNvSpPr/>
+          <p:nvPr/>
+        </p:nvSpPr>
+        <p:spPr>
+          <a:xfrm>
+            <a:off x="4663440" y="4572000"/>
+            <a:ext cx="2926080" cy="594360"/>
+          </a:xfrm>
+          <a:prstGeom prst="rect">
+            <a:avLst/>
+          </a:prstGeom>
+          <a:noFill/>
+          <a:ln/>
+        </p:spPr>
+        <p:txBody>
+          <a:bodyPr wrap="square" rtlCol="0" anchor="ctr"/>
+          <a:lstStyle/>
+          <a:p>
+            <a:pPr algn="ctr" indent="0" marL="0">
+              <a:buNone/>
+            </a:pPr>
+            <a:r>
+              <a:rPr lang="en-US" sz="1100" b="1" dirty="0">
+                <a:solidFill>
+                  <a:srgbClr val="10B981"/>
+                </a:solidFill>
+              </a:rPr>
+              <a:t>📈 Barqaror O'sish &amp; Yuqori Daromad</a:t>
+            </a:r>
+            <a:endParaRPr lang="en-US" sz="1100" dirty="0"/>
+          </a:p>
+        </p:txBody>
+      </p:sp>
+      <p:sp>
+        <p:nvSpPr>
+          <p:cNvPr id="12" name="Shape 9"/>
+          <p:cNvSpPr/>
+          <p:nvPr/>
+        </p:nvSpPr>
+        <p:spPr>
+          <a:xfrm>
+            <a:off x="7863840" y="4572000"/>
+            <a:ext cx="2926080" cy="594360"/>
+          </a:xfrm>
+          <a:prstGeom prst="roundRect">
+            <a:avLst>
+              <a:gd name="adj" fmla="val 46154"/>
+            </a:avLst>
+          </a:prstGeom>
+          <a:solidFill>
+            <a:srgbClr val="242628"/>
+          </a:solidFill>
+          <a:ln w="15240">
+            <a:solidFill>
+              <a:srgbClr val="FFFFFF"/>
+            </a:solidFill>
+            <a:prstDash val="solid"/>
+          </a:ln>
+        </p:spPr>
+      </p:sp>
+      <p:sp>
+        <p:nvSpPr>
+          <p:cNvPr id="13" name="Text 10"/>
+          <p:cNvSpPr/>
+          <p:nvPr/>
+        </p:nvSpPr>
+        <p:spPr>
+          <a:xfrm>
+            <a:off x="7863840" y="4572000"/>
+            <a:ext cx="2926080" cy="594360"/>
+          </a:xfrm>
+          <a:prstGeom prst="rect">
+            <a:avLst/>
+          </a:prstGeom>
+          <a:noFill/>
+          <a:ln/>
+        </p:spPr>
+        <p:txBody>
+          <a:bodyPr wrap="square" rtlCol="0" anchor="ctr"/>
+          <a:lstStyle/>
+          <a:p>
+            <a:pPr algn="ctr" indent="0" marL="0">
+              <a:buNone/>
+            </a:pPr>
+            <a:r>
+              <a:rPr lang="en-US" sz="1100" b="1" dirty="0">
+                <a:solidFill>
+                  <a:srgbClr val="FFFFFF"/>
+                </a:solidFill>
+              </a:rPr>
+              <a:t>🔒 100% Shaffof va Himoyalangan Kapital</a:t>
+            </a:r>
+            <a:endParaRPr lang="en-US" sz="1100" dirty="0"/>
+          </a:p>
+        </p:txBody>
+      </p:sp>
+    </p:spTree>
+  </p:cSld>
+  <p:clrMapOvr>
+    <a:masterClrMapping/>
+  </p:clrMapOvr>
+</p:sld>
+</file>
+
+<file path=ppt/slides/slide25.xml><?xml version="1.0" encoding="utf-8"?>
+<p:sld xmlns:a="http://schemas.openxmlformats.org/drawingml/2006/main" xmlns:r="http://schemas.openxmlformats.org/officeDocument/2006/relationships" xmlns:p="http://schemas.openxmlformats.org/presentationml/2006/main">
+  <p:cSld name="Slide 25">
+    <p:bg>
+      <p:bgPr>
+        <a:solidFill>
+          <a:srgbClr val="171819"/>
+        </a:solidFill>
+      </p:bgPr>
+    </p:bg>
+    <p:spTree>
+      <p:nvGrpSpPr>
+        <p:cNvPr id="1" name=""/>
+        <p:cNvGrpSpPr/>
+        <p:nvPr/>
+      </p:nvGrpSpPr>
+      <p:grpSpPr>
+        <a:xfrm>
+          <a:off x="0" y="0"/>
+          <a:ext cx="0" cy="0"/>
+          <a:chOff x="0" y="0"/>
+          <a:chExt cx="0" cy="0"/>
+        </a:xfrm>
+      </p:grpSpPr>
+      <p:pic>
+        <p:nvPicPr>
+          <p:cNvPr id="2" name="Image 0" descr="C:\Users\WECAN\Downloads\akfa invest 5050\assets\construction.jpg">    </p:cNvPr>
           <p:cNvPicPr>
             <a:picLocks noChangeAspect="1"/>
           </p:cNvPicPr>
@@ -39701,7 +40197,7 @@
       </p:sp>
       <p:pic>
         <p:nvPicPr>
-          <p:cNvPr id="5" name="Image 0" descr="C:\Users\WECAN\Downloads\akfa invest — копия\assets\warehouse.jpg">    </p:cNvPr>
+          <p:cNvPr id="5" name="Image 0" descr="C:\Users\WECAN\Downloads\akfa invest 5050\assets\warehouse.jpg">    </p:cNvPr>
           <p:cNvPicPr>
             <a:picLocks noChangeAspect="1"/>
           </p:cNvPicPr>
